--- a/Science_Complete_Course_SagarSir/04_Science_MahaManthan_मॉक_टेस्ट्स/Class_18_Grand_Physics_MahaManthan.pptx
+++ b/Science_Complete_Course_SagarSir/04_Science_MahaManthan_मॉक_टेस्ट्स/Class_18_Grand_Physics_MahaManthan.pptx
@@ -3583,7 +3583,7 @@
               </a:defRPr>
             </a:pPr>
             <a:r>
-              <a:t>मार्गदर्शक: सागर सर (NMMS King)  |  Helpline / WhatsApp: +91 91101 13671  |  Website: sagarcoaching.tech</a:t>
+              <a:t>मार्गदर्शक: सागर सर (NMMS King)  |  Website: sagarcoaching.tech</a:t>
             </a:r>
           </a:p>
         </p:txBody>
@@ -3755,7 +3755,7 @@
               </a:defRPr>
             </a:pPr>
             <a:r>
-              <a:t>WhatsApp / Helpline: +91 91101 13671  |  वेबसाइट: sagarcoaching.tech  |  Slide 10 of 63</a:t>
+              <a:t>वेबसाइट: sagarcoaching.tech  |  Slide 10 of 63</a:t>
             </a:r>
           </a:p>
         </p:txBody>
@@ -4273,7 +4273,7 @@
               </a:defRPr>
             </a:pPr>
             <a:r>
-              <a:t>WhatsApp / Helpline: +91 91101 13671  |  वेबसाइट: sagarcoaching.tech  |  Slide 11 of 63</a:t>
+              <a:t>वेबसाइट: sagarcoaching.tech  |  Slide 11 of 63</a:t>
             </a:r>
           </a:p>
         </p:txBody>
@@ -4720,7 +4720,7 @@
               </a:defRPr>
             </a:pPr>
             <a:r>
-              <a:t>WhatsApp / Helpline: +91 91101 13671  |  वेबसाइट: sagarcoaching.tech  |  Slide 12 of 63</a:t>
+              <a:t>वेबसाइट: sagarcoaching.tech  |  Slide 12 of 63</a:t>
             </a:r>
           </a:p>
         </p:txBody>
@@ -5238,7 +5238,7 @@
               </a:defRPr>
             </a:pPr>
             <a:r>
-              <a:t>WhatsApp / Helpline: +91 91101 13671  |  वेबसाइट: sagarcoaching.tech  |  Slide 13 of 63</a:t>
+              <a:t>वेबसाइट: sagarcoaching.tech  |  Slide 13 of 63</a:t>
             </a:r>
           </a:p>
         </p:txBody>
@@ -5685,7 +5685,7 @@
               </a:defRPr>
             </a:pPr>
             <a:r>
-              <a:t>WhatsApp / Helpline: +91 91101 13671  |  वेबसाइट: sagarcoaching.tech  |  Slide 14 of 63</a:t>
+              <a:t>वेबसाइट: sagarcoaching.tech  |  Slide 14 of 63</a:t>
             </a:r>
           </a:p>
         </p:txBody>
@@ -6203,7 +6203,7 @@
               </a:defRPr>
             </a:pPr>
             <a:r>
-              <a:t>WhatsApp / Helpline: +91 91101 13671  |  वेबसाइट: sagarcoaching.tech  |  Slide 15 of 63</a:t>
+              <a:t>वेबसाइट: sagarcoaching.tech  |  Slide 15 of 63</a:t>
             </a:r>
           </a:p>
         </p:txBody>
@@ -6650,7 +6650,7 @@
               </a:defRPr>
             </a:pPr>
             <a:r>
-              <a:t>WhatsApp / Helpline: +91 91101 13671  |  वेबसाइट: sagarcoaching.tech  |  Slide 16 of 63</a:t>
+              <a:t>वेबसाइट: sagarcoaching.tech  |  Slide 16 of 63</a:t>
             </a:r>
           </a:p>
         </p:txBody>
@@ -7168,7 +7168,7 @@
               </a:defRPr>
             </a:pPr>
             <a:r>
-              <a:t>WhatsApp / Helpline: +91 91101 13671  |  वेबसाइट: sagarcoaching.tech  |  Slide 17 of 63</a:t>
+              <a:t>वेबसाइट: sagarcoaching.tech  |  Slide 17 of 63</a:t>
             </a:r>
           </a:p>
         </p:txBody>
@@ -7615,7 +7615,7 @@
               </a:defRPr>
             </a:pPr>
             <a:r>
-              <a:t>WhatsApp / Helpline: +91 91101 13671  |  वेबसाइट: sagarcoaching.tech  |  Slide 18 of 63</a:t>
+              <a:t>वेबसाइट: sagarcoaching.tech  |  Slide 18 of 63</a:t>
             </a:r>
           </a:p>
         </p:txBody>
@@ -8133,7 +8133,7 @@
               </a:defRPr>
             </a:pPr>
             <a:r>
-              <a:t>WhatsApp / Helpline: +91 91101 13671  |  वेबसाइट: sagarcoaching.tech  |  Slide 19 of 63</a:t>
+              <a:t>वेबसाइट: sagarcoaching.tech  |  Slide 19 of 63</a:t>
             </a:r>
           </a:p>
         </p:txBody>
@@ -8580,7 +8580,7 @@
               </a:defRPr>
             </a:pPr>
             <a:r>
-              <a:t>WhatsApp / Helpline: +91 91101 13671  |  वेबसाइट: sagarcoaching.tech  |  Slide 2 of 63</a:t>
+              <a:t>वेबसाइट: sagarcoaching.tech  |  Slide 2 of 63</a:t>
             </a:r>
           </a:p>
         </p:txBody>
@@ -8902,7 +8902,7 @@
               </a:defRPr>
             </a:pPr>
             <a:r>
-              <a:t>WhatsApp / Helpline: +91 91101 13671  |  वेबसाइट: sagarcoaching.tech  |  Slide 20 of 63</a:t>
+              <a:t>वेबसाइट: sagarcoaching.tech  |  Slide 20 of 63</a:t>
             </a:r>
           </a:p>
         </p:txBody>
@@ -9420,7 +9420,7 @@
               </a:defRPr>
             </a:pPr>
             <a:r>
-              <a:t>WhatsApp / Helpline: +91 91101 13671  |  वेबसाइट: sagarcoaching.tech  |  Slide 21 of 63</a:t>
+              <a:t>वेबसाइट: sagarcoaching.tech  |  Slide 21 of 63</a:t>
             </a:r>
           </a:p>
         </p:txBody>
@@ -9867,7 +9867,7 @@
               </a:defRPr>
             </a:pPr>
             <a:r>
-              <a:t>WhatsApp / Helpline: +91 91101 13671  |  वेबसाइट: sagarcoaching.tech  |  Slide 22 of 63</a:t>
+              <a:t>वेबसाइट: sagarcoaching.tech  |  Slide 22 of 63</a:t>
             </a:r>
           </a:p>
         </p:txBody>
@@ -10385,7 +10385,7 @@
               </a:defRPr>
             </a:pPr>
             <a:r>
-              <a:t>WhatsApp / Helpline: +91 91101 13671  |  वेबसाइट: sagarcoaching.tech  |  Slide 23 of 63</a:t>
+              <a:t>वेबसाइट: sagarcoaching.tech  |  Slide 23 of 63</a:t>
             </a:r>
           </a:p>
         </p:txBody>
@@ -10832,7 +10832,7 @@
               </a:defRPr>
             </a:pPr>
             <a:r>
-              <a:t>WhatsApp / Helpline: +91 91101 13671  |  वेबसाइट: sagarcoaching.tech  |  Slide 24 of 63</a:t>
+              <a:t>वेबसाइट: sagarcoaching.tech  |  Slide 24 of 63</a:t>
             </a:r>
           </a:p>
         </p:txBody>
@@ -11350,7 +11350,7 @@
               </a:defRPr>
             </a:pPr>
             <a:r>
-              <a:t>WhatsApp / Helpline: +91 91101 13671  |  वेबसाइट: sagarcoaching.tech  |  Slide 25 of 63</a:t>
+              <a:t>वेबसाइट: sagarcoaching.tech  |  Slide 25 of 63</a:t>
             </a:r>
           </a:p>
         </p:txBody>
@@ -11797,7 +11797,7 @@
               </a:defRPr>
             </a:pPr>
             <a:r>
-              <a:t>WhatsApp / Helpline: +91 91101 13671  |  वेबसाइट: sagarcoaching.tech  |  Slide 26 of 63</a:t>
+              <a:t>वेबसाइट: sagarcoaching.tech  |  Slide 26 of 63</a:t>
             </a:r>
           </a:p>
         </p:txBody>
@@ -12315,7 +12315,7 @@
               </a:defRPr>
             </a:pPr>
             <a:r>
-              <a:t>WhatsApp / Helpline: +91 91101 13671  |  वेबसाइट: sagarcoaching.tech  |  Slide 27 of 63</a:t>
+              <a:t>वेबसाइट: sagarcoaching.tech  |  Slide 27 of 63</a:t>
             </a:r>
           </a:p>
         </p:txBody>
@@ -12762,7 +12762,7 @@
               </a:defRPr>
             </a:pPr>
             <a:r>
-              <a:t>WhatsApp / Helpline: +91 91101 13671  |  वेबसाइट: sagarcoaching.tech  |  Slide 28 of 63</a:t>
+              <a:t>वेबसाइट: sagarcoaching.tech  |  Slide 28 of 63</a:t>
             </a:r>
           </a:p>
         </p:txBody>
@@ -13280,7 +13280,7 @@
               </a:defRPr>
             </a:pPr>
             <a:r>
-              <a:t>WhatsApp / Helpline: +91 91101 13671  |  वेबसाइट: sagarcoaching.tech  |  Slide 29 of 63</a:t>
+              <a:t>वेबसाइट: sagarcoaching.tech  |  Slide 29 of 63</a:t>
             </a:r>
           </a:p>
         </p:txBody>
@@ -13727,7 +13727,7 @@
               </a:defRPr>
             </a:pPr>
             <a:r>
-              <a:t>WhatsApp / Helpline: +91 91101 13671  |  वेबसाइट: sagarcoaching.tech  |  Slide 3 of 63</a:t>
+              <a:t>वेबसाइट: sagarcoaching.tech  |  Slide 3 of 63</a:t>
             </a:r>
           </a:p>
         </p:txBody>
@@ -14174,7 +14174,7 @@
               </a:defRPr>
             </a:pPr>
             <a:r>
-              <a:t>WhatsApp / Helpline: +91 91101 13671  |  वेबसाइट: sagarcoaching.tech  |  Slide 30 of 63</a:t>
+              <a:t>वेबसाइट: sagarcoaching.tech  |  Slide 30 of 63</a:t>
             </a:r>
           </a:p>
         </p:txBody>
@@ -14692,7 +14692,7 @@
               </a:defRPr>
             </a:pPr>
             <a:r>
-              <a:t>WhatsApp / Helpline: +91 91101 13671  |  वेबसाइट: sagarcoaching.tech  |  Slide 31 of 63</a:t>
+              <a:t>वेबसाइट: sagarcoaching.tech  |  Slide 31 of 63</a:t>
             </a:r>
           </a:p>
         </p:txBody>
@@ -15139,7 +15139,7 @@
               </a:defRPr>
             </a:pPr>
             <a:r>
-              <a:t>WhatsApp / Helpline: +91 91101 13671  |  वेबसाइट: sagarcoaching.tech  |  Slide 32 of 63</a:t>
+              <a:t>वेबसाइट: sagarcoaching.tech  |  Slide 32 of 63</a:t>
             </a:r>
           </a:p>
         </p:txBody>
@@ -15657,7 +15657,7 @@
               </a:defRPr>
             </a:pPr>
             <a:r>
-              <a:t>WhatsApp / Helpline: +91 91101 13671  |  वेबसाइट: sagarcoaching.tech  |  Slide 33 of 63</a:t>
+              <a:t>वेबसाइट: sagarcoaching.tech  |  Slide 33 of 63</a:t>
             </a:r>
           </a:p>
         </p:txBody>
@@ -16104,7 +16104,7 @@
               </a:defRPr>
             </a:pPr>
             <a:r>
-              <a:t>WhatsApp / Helpline: +91 91101 13671  |  वेबसाइट: sagarcoaching.tech  |  Slide 34 of 63</a:t>
+              <a:t>वेबसाइट: sagarcoaching.tech  |  Slide 34 of 63</a:t>
             </a:r>
           </a:p>
         </p:txBody>
@@ -16622,7 +16622,7 @@
               </a:defRPr>
             </a:pPr>
             <a:r>
-              <a:t>WhatsApp / Helpline: +91 91101 13671  |  वेबसाइट: sagarcoaching.tech  |  Slide 35 of 63</a:t>
+              <a:t>वेबसाइट: sagarcoaching.tech  |  Slide 35 of 63</a:t>
             </a:r>
           </a:p>
         </p:txBody>
@@ -17069,7 +17069,7 @@
               </a:defRPr>
             </a:pPr>
             <a:r>
-              <a:t>WhatsApp / Helpline: +91 91101 13671  |  वेबसाइट: sagarcoaching.tech  |  Slide 36 of 63</a:t>
+              <a:t>वेबसाइट: sagarcoaching.tech  |  Slide 36 of 63</a:t>
             </a:r>
           </a:p>
         </p:txBody>
@@ -17587,7 +17587,7 @@
               </a:defRPr>
             </a:pPr>
             <a:r>
-              <a:t>WhatsApp / Helpline: +91 91101 13671  |  वेबसाइट: sagarcoaching.tech  |  Slide 37 of 63</a:t>
+              <a:t>वेबसाइट: sagarcoaching.tech  |  Slide 37 of 63</a:t>
             </a:r>
           </a:p>
         </p:txBody>
@@ -18034,7 +18034,7 @@
               </a:defRPr>
             </a:pPr>
             <a:r>
-              <a:t>WhatsApp / Helpline: +91 91101 13671  |  वेबसाइट: sagarcoaching.tech  |  Slide 38 of 63</a:t>
+              <a:t>वेबसाइट: sagarcoaching.tech  |  Slide 38 of 63</a:t>
             </a:r>
           </a:p>
         </p:txBody>
@@ -18552,7 +18552,7 @@
               </a:defRPr>
             </a:pPr>
             <a:r>
-              <a:t>WhatsApp / Helpline: +91 91101 13671  |  वेबसाइट: sagarcoaching.tech  |  Slide 39 of 63</a:t>
+              <a:t>वेबसाइट: sagarcoaching.tech  |  Slide 39 of 63</a:t>
             </a:r>
           </a:p>
         </p:txBody>
@@ -18999,7 +18999,7 @@
               </a:defRPr>
             </a:pPr>
             <a:r>
-              <a:t>WhatsApp / Helpline: +91 91101 13671  |  वेबसाइट: sagarcoaching.tech  |  Slide 4 of 63</a:t>
+              <a:t>वेबसाइट: sagarcoaching.tech  |  Slide 4 of 63</a:t>
             </a:r>
           </a:p>
         </p:txBody>
@@ -19517,7 +19517,7 @@
               </a:defRPr>
             </a:pPr>
             <a:r>
-              <a:t>WhatsApp / Helpline: +91 91101 13671  |  वेबसाइट: sagarcoaching.tech  |  Slide 40 of 63</a:t>
+              <a:t>वेबसाइट: sagarcoaching.tech  |  Slide 40 of 63</a:t>
             </a:r>
           </a:p>
         </p:txBody>
@@ -20035,7 +20035,7 @@
               </a:defRPr>
             </a:pPr>
             <a:r>
-              <a:t>WhatsApp / Helpline: +91 91101 13671  |  वेबसाइट: sagarcoaching.tech  |  Slide 41 of 63</a:t>
+              <a:t>वेबसाइट: sagarcoaching.tech  |  Slide 41 of 63</a:t>
             </a:r>
           </a:p>
         </p:txBody>
@@ -20482,7 +20482,7 @@
               </a:defRPr>
             </a:pPr>
             <a:r>
-              <a:t>WhatsApp / Helpline: +91 91101 13671  |  वेबसाइट: sagarcoaching.tech  |  Slide 42 of 63</a:t>
+              <a:t>वेबसाइट: sagarcoaching.tech  |  Slide 42 of 63</a:t>
             </a:r>
           </a:p>
         </p:txBody>
@@ -21000,7 +21000,7 @@
               </a:defRPr>
             </a:pPr>
             <a:r>
-              <a:t>WhatsApp / Helpline: +91 91101 13671  |  वेबसाइट: sagarcoaching.tech  |  Slide 43 of 63</a:t>
+              <a:t>वेबसाइट: sagarcoaching.tech  |  Slide 43 of 63</a:t>
             </a:r>
           </a:p>
         </p:txBody>
@@ -21447,7 +21447,7 @@
               </a:defRPr>
             </a:pPr>
             <a:r>
-              <a:t>WhatsApp / Helpline: +91 91101 13671  |  वेबसाइट: sagarcoaching.tech  |  Slide 44 of 63</a:t>
+              <a:t>वेबसाइट: sagarcoaching.tech  |  Slide 44 of 63</a:t>
             </a:r>
           </a:p>
         </p:txBody>
@@ -21965,7 +21965,7 @@
               </a:defRPr>
             </a:pPr>
             <a:r>
-              <a:t>WhatsApp / Helpline: +91 91101 13671  |  वेबसाइट: sagarcoaching.tech  |  Slide 45 of 63</a:t>
+              <a:t>वेबसाइट: sagarcoaching.tech  |  Slide 45 of 63</a:t>
             </a:r>
           </a:p>
         </p:txBody>
@@ -22412,7 +22412,7 @@
               </a:defRPr>
             </a:pPr>
             <a:r>
-              <a:t>WhatsApp / Helpline: +91 91101 13671  |  वेबसाइट: sagarcoaching.tech  |  Slide 46 of 63</a:t>
+              <a:t>वेबसाइट: sagarcoaching.tech  |  Slide 46 of 63</a:t>
             </a:r>
           </a:p>
         </p:txBody>
@@ -22930,7 +22930,7 @@
               </a:defRPr>
             </a:pPr>
             <a:r>
-              <a:t>WhatsApp / Helpline: +91 91101 13671  |  वेबसाइट: sagarcoaching.tech  |  Slide 47 of 63</a:t>
+              <a:t>वेबसाइट: sagarcoaching.tech  |  Slide 47 of 63</a:t>
             </a:r>
           </a:p>
         </p:txBody>
@@ -23377,7 +23377,7 @@
               </a:defRPr>
             </a:pPr>
             <a:r>
-              <a:t>WhatsApp / Helpline: +91 91101 13671  |  वेबसाइट: sagarcoaching.tech  |  Slide 48 of 63</a:t>
+              <a:t>वेबसाइट: sagarcoaching.tech  |  Slide 48 of 63</a:t>
             </a:r>
           </a:p>
         </p:txBody>
@@ -23895,7 +23895,7 @@
               </a:defRPr>
             </a:pPr>
             <a:r>
-              <a:t>WhatsApp / Helpline: +91 91101 13671  |  वेबसाइट: sagarcoaching.tech  |  Slide 49 of 63</a:t>
+              <a:t>वेबसाइट: sagarcoaching.tech  |  Slide 49 of 63</a:t>
             </a:r>
           </a:p>
         </p:txBody>
@@ -24342,7 +24342,7 @@
               </a:defRPr>
             </a:pPr>
             <a:r>
-              <a:t>WhatsApp / Helpline: +91 91101 13671  |  वेबसाइट: sagarcoaching.tech  |  Slide 5 of 63</a:t>
+              <a:t>वेबसाइट: sagarcoaching.tech  |  Slide 5 of 63</a:t>
             </a:r>
           </a:p>
         </p:txBody>
@@ -24789,7 +24789,7 @@
               </a:defRPr>
             </a:pPr>
             <a:r>
-              <a:t>WhatsApp / Helpline: +91 91101 13671  |  वेबसाइट: sagarcoaching.tech  |  Slide 50 of 63</a:t>
+              <a:t>वेबसाइट: sagarcoaching.tech  |  Slide 50 of 63</a:t>
             </a:r>
           </a:p>
         </p:txBody>
@@ -25307,7 +25307,7 @@
               </a:defRPr>
             </a:pPr>
             <a:r>
-              <a:t>WhatsApp / Helpline: +91 91101 13671  |  वेबसाइट: sagarcoaching.tech  |  Slide 51 of 63</a:t>
+              <a:t>वेबसाइट: sagarcoaching.tech  |  Slide 51 of 63</a:t>
             </a:r>
           </a:p>
         </p:txBody>
@@ -25754,7 +25754,7 @@
               </a:defRPr>
             </a:pPr>
             <a:r>
-              <a:t>WhatsApp / Helpline: +91 91101 13671  |  वेबसाइट: sagarcoaching.tech  |  Slide 52 of 63</a:t>
+              <a:t>वेबसाइट: sagarcoaching.tech  |  Slide 52 of 63</a:t>
             </a:r>
           </a:p>
         </p:txBody>
@@ -26272,7 +26272,7 @@
               </a:defRPr>
             </a:pPr>
             <a:r>
-              <a:t>WhatsApp / Helpline: +91 91101 13671  |  वेबसाइट: sagarcoaching.tech  |  Slide 53 of 63</a:t>
+              <a:t>वेबसाइट: sagarcoaching.tech  |  Slide 53 of 63</a:t>
             </a:r>
           </a:p>
         </p:txBody>
@@ -26719,7 +26719,7 @@
               </a:defRPr>
             </a:pPr>
             <a:r>
-              <a:t>WhatsApp / Helpline: +91 91101 13671  |  वेबसाइट: sagarcoaching.tech  |  Slide 54 of 63</a:t>
+              <a:t>वेबसाइट: sagarcoaching.tech  |  Slide 54 of 63</a:t>
             </a:r>
           </a:p>
         </p:txBody>
@@ -27237,7 +27237,7 @@
               </a:defRPr>
             </a:pPr>
             <a:r>
-              <a:t>WhatsApp / Helpline: +91 91101 13671  |  वेबसाइट: sagarcoaching.tech  |  Slide 55 of 63</a:t>
+              <a:t>वेबसाइट: sagarcoaching.tech  |  Slide 55 of 63</a:t>
             </a:r>
           </a:p>
         </p:txBody>
@@ -27684,7 +27684,7 @@
               </a:defRPr>
             </a:pPr>
             <a:r>
-              <a:t>WhatsApp / Helpline: +91 91101 13671  |  वेबसाइट: sagarcoaching.tech  |  Slide 56 of 63</a:t>
+              <a:t>वेबसाइट: sagarcoaching.tech  |  Slide 56 of 63</a:t>
             </a:r>
           </a:p>
         </p:txBody>
@@ -28202,7 +28202,7 @@
               </a:defRPr>
             </a:pPr>
             <a:r>
-              <a:t>WhatsApp / Helpline: +91 91101 13671  |  वेबसाइट: sagarcoaching.tech  |  Slide 57 of 63</a:t>
+              <a:t>वेबसाइट: sagarcoaching.tech  |  Slide 57 of 63</a:t>
             </a:r>
           </a:p>
         </p:txBody>
@@ -28649,7 +28649,7 @@
               </a:defRPr>
             </a:pPr>
             <a:r>
-              <a:t>WhatsApp / Helpline: +91 91101 13671  |  वेबसाइट: sagarcoaching.tech  |  Slide 58 of 63</a:t>
+              <a:t>वेबसाइट: sagarcoaching.tech  |  Slide 58 of 63</a:t>
             </a:r>
           </a:p>
         </p:txBody>
@@ -29167,7 +29167,7 @@
               </a:defRPr>
             </a:pPr>
             <a:r>
-              <a:t>WhatsApp / Helpline: +91 91101 13671  |  वेबसाइट: sagarcoaching.tech  |  Slide 59 of 63</a:t>
+              <a:t>वेबसाइट: sagarcoaching.tech  |  Slide 59 of 63</a:t>
             </a:r>
           </a:p>
         </p:txBody>
@@ -29614,7 +29614,7 @@
               </a:defRPr>
             </a:pPr>
             <a:r>
-              <a:t>WhatsApp / Helpline: +91 91101 13671  |  वेबसाइट: sagarcoaching.tech  |  Slide 6 of 63</a:t>
+              <a:t>वेबसाइट: sagarcoaching.tech  |  Slide 6 of 63</a:t>
             </a:r>
           </a:p>
         </p:txBody>
@@ -30132,7 +30132,7 @@
               </a:defRPr>
             </a:pPr>
             <a:r>
-              <a:t>WhatsApp / Helpline: +91 91101 13671  |  वेबसाइट: sagarcoaching.tech  |  Slide 60 of 63</a:t>
+              <a:t>वेबसाइट: sagarcoaching.tech  |  Slide 60 of 63</a:t>
             </a:r>
           </a:p>
         </p:txBody>
@@ -30650,7 +30650,7 @@
               </a:defRPr>
             </a:pPr>
             <a:r>
-              <a:t>WhatsApp / Helpline: +91 91101 13671  |  वेबसाइट: sagarcoaching.tech  |  Slide 61 of 63</a:t>
+              <a:t>वेबसाइट: sagarcoaching.tech  |  Slide 61 of 63</a:t>
             </a:r>
           </a:p>
         </p:txBody>
@@ -31097,7 +31097,7 @@
               </a:defRPr>
             </a:pPr>
             <a:r>
-              <a:t>WhatsApp / Helpline: +91 91101 13671  |  वेबसाइट: sagarcoaching.tech  |  Slide 62 of 63</a:t>
+              <a:t>वेबसाइट: sagarcoaching.tech  |  Slide 62 of 63</a:t>
             </a:r>
           </a:p>
         </p:txBody>
@@ -31615,7 +31615,7 @@
               </a:defRPr>
             </a:pPr>
             <a:r>
-              <a:t>WhatsApp / Helpline: +91 91101 13671  |  वेबसाइट: sagarcoaching.tech  |  Slide 63 of 63</a:t>
+              <a:t>वेबसाइट: sagarcoaching.tech  |  Slide 63 of 63</a:t>
             </a:r>
           </a:p>
         </p:txBody>
@@ -31937,7 +31937,7 @@
               </a:defRPr>
             </a:pPr>
             <a:r>
-              <a:t>WhatsApp / Helpline: +91 91101 13671  |  वेबसाइट: sagarcoaching.tech  |  Slide 7 of 63</a:t>
+              <a:t>वेबसाइट: sagarcoaching.tech  |  Slide 7 of 63</a:t>
             </a:r>
           </a:p>
         </p:txBody>
@@ -32384,7 +32384,7 @@
               </a:defRPr>
             </a:pPr>
             <a:r>
-              <a:t>WhatsApp / Helpline: +91 91101 13671  |  वेबसाइट: sagarcoaching.tech  |  Slide 8 of 63</a:t>
+              <a:t>वेबसाइट: sagarcoaching.tech  |  Slide 8 of 63</a:t>
             </a:r>
           </a:p>
         </p:txBody>
@@ -32902,7 +32902,7 @@
               </a:defRPr>
             </a:pPr>
             <a:r>
-              <a:t>WhatsApp / Helpline: +91 91101 13671  |  वेबसाइट: sagarcoaching.tech  |  Slide 9 of 63</a:t>
+              <a:t>वेबसाइट: sagarcoaching.tech  |  Slide 9 of 63</a:t>
             </a:r>
           </a:p>
         </p:txBody>
